--- a/01_FoundationProjects/MFL14_Ultrasonic_Pollution/MFL14_Ultrasonic_Pollution.pptx
+++ b/01_FoundationProjects/MFL14_Ultrasonic_Pollution/MFL14_Ultrasonic_Pollution.pptx
@@ -266,7 +266,7 @@
           <a:p>
             <a:fld id="{375049E3-AEF5-412D-9F98-5201579F9569}" type="datetimeFigureOut">
               <a:rPr lang="en-GB" smtClean="0"/>
-              <a:t>11/01/2026</a:t>
+              <a:t>18/01/2026</a:t>
             </a:fld>
             <a:endParaRPr lang="en-GB"/>
           </a:p>
@@ -466,7 +466,7 @@
           <a:p>
             <a:fld id="{375049E3-AEF5-412D-9F98-5201579F9569}" type="datetimeFigureOut">
               <a:rPr lang="en-GB" smtClean="0"/>
-              <a:t>11/01/2026</a:t>
+              <a:t>18/01/2026</a:t>
             </a:fld>
             <a:endParaRPr lang="en-GB"/>
           </a:p>
@@ -676,7 +676,7 @@
           <a:p>
             <a:fld id="{375049E3-AEF5-412D-9F98-5201579F9569}" type="datetimeFigureOut">
               <a:rPr lang="en-GB" smtClean="0"/>
-              <a:t>11/01/2026</a:t>
+              <a:t>18/01/2026</a:t>
             </a:fld>
             <a:endParaRPr lang="en-GB"/>
           </a:p>
@@ -876,7 +876,7 @@
           <a:p>
             <a:fld id="{375049E3-AEF5-412D-9F98-5201579F9569}" type="datetimeFigureOut">
               <a:rPr lang="en-GB" smtClean="0"/>
-              <a:t>11/01/2026</a:t>
+              <a:t>18/01/2026</a:t>
             </a:fld>
             <a:endParaRPr lang="en-GB"/>
           </a:p>
@@ -1152,7 +1152,7 @@
           <a:p>
             <a:fld id="{375049E3-AEF5-412D-9F98-5201579F9569}" type="datetimeFigureOut">
               <a:rPr lang="en-GB" smtClean="0"/>
-              <a:t>11/01/2026</a:t>
+              <a:t>18/01/2026</a:t>
             </a:fld>
             <a:endParaRPr lang="en-GB"/>
           </a:p>
@@ -1420,7 +1420,7 @@
           <a:p>
             <a:fld id="{375049E3-AEF5-412D-9F98-5201579F9569}" type="datetimeFigureOut">
               <a:rPr lang="en-GB" smtClean="0"/>
-              <a:t>11/01/2026</a:t>
+              <a:t>18/01/2026</a:t>
             </a:fld>
             <a:endParaRPr lang="en-GB"/>
           </a:p>
@@ -1835,7 +1835,7 @@
           <a:p>
             <a:fld id="{375049E3-AEF5-412D-9F98-5201579F9569}" type="datetimeFigureOut">
               <a:rPr lang="en-GB" smtClean="0"/>
-              <a:t>11/01/2026</a:t>
+              <a:t>18/01/2026</a:t>
             </a:fld>
             <a:endParaRPr lang="en-GB"/>
           </a:p>
@@ -1977,7 +1977,7 @@
           <a:p>
             <a:fld id="{375049E3-AEF5-412D-9F98-5201579F9569}" type="datetimeFigureOut">
               <a:rPr lang="en-GB" smtClean="0"/>
-              <a:t>11/01/2026</a:t>
+              <a:t>18/01/2026</a:t>
             </a:fld>
             <a:endParaRPr lang="en-GB"/>
           </a:p>
@@ -2090,7 +2090,7 @@
           <a:p>
             <a:fld id="{375049E3-AEF5-412D-9F98-5201579F9569}" type="datetimeFigureOut">
               <a:rPr lang="en-GB" smtClean="0"/>
-              <a:t>11/01/2026</a:t>
+              <a:t>18/01/2026</a:t>
             </a:fld>
             <a:endParaRPr lang="en-GB"/>
           </a:p>
@@ -2403,7 +2403,7 @@
           <a:p>
             <a:fld id="{375049E3-AEF5-412D-9F98-5201579F9569}" type="datetimeFigureOut">
               <a:rPr lang="en-GB" smtClean="0"/>
-              <a:t>11/01/2026</a:t>
+              <a:t>18/01/2026</a:t>
             </a:fld>
             <a:endParaRPr lang="en-GB"/>
           </a:p>
@@ -2692,7 +2692,7 @@
           <a:p>
             <a:fld id="{375049E3-AEF5-412D-9F98-5201579F9569}" type="datetimeFigureOut">
               <a:rPr lang="en-GB" smtClean="0"/>
-              <a:t>11/01/2026</a:t>
+              <a:t>18/01/2026</a:t>
             </a:fld>
             <a:endParaRPr lang="en-GB"/>
           </a:p>
@@ -2935,7 +2935,7 @@
           <a:p>
             <a:fld id="{375049E3-AEF5-412D-9F98-5201579F9569}" type="datetimeFigureOut">
               <a:rPr lang="en-GB" smtClean="0"/>
-              <a:t>11/01/2026</a:t>
+              <a:t>18/01/2026</a:t>
             </a:fld>
             <a:endParaRPr lang="en-GB"/>
           </a:p>
@@ -3872,49 +3872,6 @@
       </p:sp>
       <p:sp>
         <p:nvSpPr>
-          <p:cNvPr id="6" name="TextBox 5">
-            <a:extLst>
-              <a:ext uri="{FF2B5EF4-FFF2-40B4-BE49-F238E27FC236}">
-                <a16:creationId xmlns:a16="http://schemas.microsoft.com/office/drawing/2014/main" id="{2C009162-A8C6-AAA3-354C-48ACA3179781}"/>
-              </a:ext>
-            </a:extLst>
-          </p:cNvPr>
-          <p:cNvSpPr txBox="1"/>
-          <p:nvPr/>
-        </p:nvSpPr>
-        <p:spPr>
-          <a:xfrm>
-            <a:off x="838200" y="5003688"/>
-            <a:ext cx="4309253" cy="369332"/>
-          </a:xfrm>
-          <a:prstGeom prst="rect">
-            <a:avLst/>
-          </a:prstGeom>
-          <a:noFill/>
-          <a:ln>
-            <a:noFill/>
-          </a:ln>
-        </p:spPr>
-        <p:txBody>
-          <a:bodyPr wrap="square">
-            <a:spAutoFit/>
-          </a:bodyPr>
-          <a:lstStyle/>
-          <a:p>
-            <a:r>
-              <a:rPr lang="en-GB" b="1" dirty="0"/>
-              <a:t>Code for MFL14 </a:t>
-            </a:r>
-            <a:r>
-              <a:rPr lang="sv-SE" b="1" dirty="0"/>
-              <a:t>(MFL14.ino):</a:t>
-            </a:r>
-            <a:endParaRPr lang="en-GB" b="1" dirty="0"/>
-          </a:p>
-        </p:txBody>
-      </p:sp>
-      <p:sp>
-        <p:nvSpPr>
           <p:cNvPr id="3" name="Date Placeholder 2">
             <a:extLst>
               <a:ext uri="{FF2B5EF4-FFF2-40B4-BE49-F238E27FC236}">
@@ -4351,7 +4308,7 @@
           <a:p>
             <a:r>
               <a:rPr lang="en-GB" sz="1800" b="1" dirty="0"/>
-              <a:t>Execute the code (MFL14.ino) in the motion creative board</a:t>
+              <a:t>Execute the code in the motion creative board</a:t>
             </a:r>
           </a:p>
         </p:txBody>
@@ -4748,7 +4705,7 @@
         <p:spPr>
           <a:xfrm>
             <a:off x="838200" y="5003688"/>
-            <a:ext cx="4309253" cy="1477328"/>
+            <a:ext cx="4309253" cy="1754326"/>
           </a:xfrm>
           <a:prstGeom prst="rect">
             <a:avLst/>
@@ -4772,7 +4729,15 @@
             </a:r>
             <a:r>
               <a:rPr lang="sv-SE" b="1" dirty="0"/>
-              <a:t>(MFL14.ino):</a:t>
+              <a:t>(</a:t>
+            </a:r>
+            <a:r>
+              <a:rPr lang="en-GB" b="1" dirty="0"/>
+              <a:t>MFL14_Ultrasonic</a:t>
+            </a:r>
+            <a:r>
+              <a:rPr lang="sv-SE" b="1" dirty="0"/>
+              <a:t>.ino):</a:t>
             </a:r>
           </a:p>
           <a:p>
@@ -4780,7 +4745,7 @@
               <a:rPr lang="en-GB" b="1" dirty="0">
                 <a:hlinkClick r:id="rId4"/>
               </a:rPr>
-              <a:t>https://github.com/info-zas/zas-robotics-motion/blob/main/01_FoundationProjects/MFL14/MFL14/MFL14.ino</a:t>
+              <a:t>https://github.com/info-zas/zas-robotics-motion/tree/main/01_FoundationProjects/MFL14_Ultrasonic_Pollution/MFL14_Ultrasonic</a:t>
             </a:r>
             <a:endParaRPr lang="en-GB" b="1" dirty="0"/>
           </a:p>
@@ -5187,7 +5152,7 @@
                 <a:ea typeface="Calibri Light" panose="020F0302020204030204" pitchFamily="34" charset="0"/>
                 <a:cs typeface="Calibri Light" panose="020F0302020204030204" pitchFamily="34" charset="0"/>
               </a:rPr>
-              <a:t>MFL14_a : </a:t>
+              <a:t>MFL14 : </a:t>
             </a:r>
             <a:br>
               <a:rPr lang="en-GB" b="1" dirty="0">
@@ -5251,7 +5216,7 @@
           <a:p>
             <a:r>
               <a:rPr lang="en-GB" sz="1800" b="1" dirty="0"/>
-              <a:t>Execute the code (MFL14.ino) in the motion creative board</a:t>
+              <a:t>Execute the code in the motion creative board</a:t>
             </a:r>
           </a:p>
         </p:txBody>
@@ -5667,7 +5632,7 @@
         <p:spPr>
           <a:xfrm>
             <a:off x="838200" y="5003688"/>
-            <a:ext cx="4309253" cy="1477328"/>
+            <a:ext cx="4309253" cy="1754326"/>
           </a:xfrm>
           <a:prstGeom prst="rect">
             <a:avLst/>
@@ -5687,21 +5652,21 @@
           <a:p>
             <a:r>
               <a:rPr lang="en-GB" b="1" dirty="0"/>
-              <a:t>Code for MFL14_a </a:t>
+              <a:t>Code for MFL14 </a:t>
             </a:r>
             <a:r>
               <a:rPr lang="sv-SE" b="1" dirty="0"/>
-              <a:t>(MFL14_a.ino):</a:t>
-            </a:r>
-          </a:p>
-          <a:p>
-            <a:r>
-              <a:rPr lang="en-GB" b="1">
+              <a:t>(.ino):</a:t>
+            </a:r>
+          </a:p>
+          <a:p>
+            <a:r>
+              <a:rPr lang="en-GB" b="1" dirty="0">
                 <a:hlinkClick r:id="rId4"/>
               </a:rPr>
-              <a:t>https://github.com/info-zas/zas-robotics-motion/blob/main/01_FoundationProjects/MFL14/MFL14_a/MFL14_a.ino</a:t>
-            </a:r>
-            <a:endParaRPr lang="en-GB" b="1"/>
+              <a:t>https://github.com/info-zas/zas-robotics-motion/tree/main/01_FoundationProjects/MFL14_Ultrasonic_Pollution/MFL14_Ultrasonic_Pollution</a:t>
+            </a:r>
+            <a:endParaRPr lang="en-GB" b="1" dirty="0"/>
           </a:p>
           <a:p>
             <a:endParaRPr lang="en-GB" b="1" dirty="0"/>
